--- a/materiales/serums/ejemplo-modulo-1.pptx
+++ b/materiales/serums/ejemplo-modulo-1.pptx
@@ -3219,7 +3219,7 @@
               </a:defRPr>
             </a:pPr>
             <a:r>
-              <a:t>Módulo 1 · Normativa y proceso del SERUMS</a:t>
+              <a:t>Módulo 1 · Salud pública</a:t>
             </a:r>
           </a:p>
         </p:txBody>
